--- a/docs/academic/MedOrch_Slides.pptx
+++ b/docs/academic/MedOrch_Slides.pptx
@@ -4410,7 +4410,7 @@
                 <a:ea typeface="Calibri" pitchFamily="34" charset="-122"/>
                 <a:cs typeface="Calibri" pitchFamily="34" charset="-120"/>
               </a:rPr>
-              <a:t>Real deployment needs clinical validation, governance and real authentication</a:t>
+              <a:t>Real deployment needs clinical validation, governance and hospital SSO/MFA</a:t>
             </a:r>
             <a:endParaRPr lang="en-US" sz="1500" dirty="0"/>
           </a:p>
